--- a/판매용_템플릿/_판매팩/인테리어_스탠다드/06_메뉴구조.pptx
+++ b/판매용_템플릿/_판매팩/인테리어_스탠다드/06_메뉴구조.pptx
@@ -948,7 +948,7 @@
             </a:avLst>
           </a:prstGeom>
           <a:solidFill>
-            <a:srgbClr val="E4762C"/>
+            <a:srgbClr val="BC5918"/>
           </a:solidFill>
           <a:ln/>
         </p:spPr>
@@ -1274,7 +1274,7 @@
             </a:avLst>
           </a:prstGeom>
           <a:solidFill>
-            <a:srgbClr val="E4762C"/>
+            <a:srgbClr val="BC5918"/>
           </a:solidFill>
           <a:ln/>
         </p:spPr>
@@ -1684,7 +1684,7 @@
             </a:avLst>
           </a:prstGeom>
           <a:solidFill>
-            <a:srgbClr val="E4762C"/>
+            <a:srgbClr val="BC5918"/>
           </a:solidFill>
           <a:ln/>
         </p:spPr>
@@ -2178,7 +2178,7 @@
             </a:avLst>
           </a:prstGeom>
           <a:solidFill>
-            <a:srgbClr val="E4762C"/>
+            <a:srgbClr val="BC5918"/>
           </a:solidFill>
           <a:ln/>
         </p:spPr>
@@ -2588,7 +2588,7 @@
             </a:avLst>
           </a:prstGeom>
           <a:solidFill>
-            <a:srgbClr val="E4762C"/>
+            <a:srgbClr val="BC5918"/>
           </a:solidFill>
           <a:ln/>
         </p:spPr>
@@ -2998,7 +2998,7 @@
             </a:avLst>
           </a:prstGeom>
           <a:solidFill>
-            <a:srgbClr val="E4762C"/>
+            <a:srgbClr val="BC5918"/>
           </a:solidFill>
           <a:ln/>
         </p:spPr>
@@ -3576,7 +3576,7 @@
             </a:avLst>
           </a:prstGeom>
           <a:solidFill>
-            <a:srgbClr val="E4762C"/>
+            <a:srgbClr val="BC5918"/>
           </a:solidFill>
           <a:ln/>
         </p:spPr>
@@ -3902,7 +3902,7 @@
             </a:avLst>
           </a:prstGeom>
           <a:solidFill>
-            <a:srgbClr val="E4762C"/>
+            <a:srgbClr val="BC5918"/>
           </a:solidFill>
           <a:ln/>
         </p:spPr>
@@ -4564,7 +4564,7 @@
             </a:avLst>
           </a:prstGeom>
           <a:solidFill>
-            <a:srgbClr val="E4762C"/>
+            <a:srgbClr val="BC5918"/>
           </a:solidFill>
           <a:ln/>
         </p:spPr>
